--- a/ai-beginner-bootcamp-outline/day_3/Day_3_Slides.pptx
+++ b/ai-beginner-bootcamp-outline/day_3/Day_3_Slides.pptx
@@ -510,7 +510,7 @@
           <a:lstStyle/>
           <a:p>
             <a:r>
-              <a:t>Welcome everyone back warmly. Say: 'Raise your hand if you've ever had to re-explain your entire project to ChatGPT in a new tab. Painful, right?' Let them laugh. Frame today as the day their assistant stops being a stranger every morning. Emphasise that memory is the single upgrade that makes an AI feel like a real team member. Reassure the non-technical folks: 'If you can remember what you had for breakfast, you already understand today's topic.'</a:t>
+              <a:t>Open warm. Remind everyone how far they have come: Day 1 they set up the workspace, Day 2 they got their assistant answering questions. Today is the day it stops being a stranger every time they say hello. Ask the room: how many of you have had to re-explain yourself to an AI three times in one sitting? Let them laugh, then say that ends today. Keep it light, no jargon yet.</a:t>
             </a:r>
           </a:p>
         </p:txBody>
@@ -580,7 +580,7 @@
           <a:lstStyle/>
           <a:p>
             <a:r>
-              <a:t>Use the goldfish or the 'brilliant consultant with amnesia' analogy: imagine hiring a world-class consultant who forgets your company name every time they walk out the door. Reveal the trick behind ChatGPT — it isn't magic, the interface is resending the transcript. This is the 'aha' moment that demystifies everything. Ask the room: 'Where has this cost you time this week?' Collect two or three real examples to reference later in the day.</a:t>
+              <a:t>Do this live if you can. Two messages in a fresh chat with no memory wired in: introduce yourself, then ask for your name. Let the failure land. Explain gently that the model is not broken and not forgetful in a human way. It genuinely receives each request in isolation, like a brilliant consultant who is handed one sticky note at a time and never keeps the old ones. Frame it as our job to hand it the whole stack of notes.</a:t>
             </a:r>
           </a:p>
         </p:txBody>
@@ -650,7 +650,7 @@
           <a:lstStyle/>
           <a:p>
             <a:r>
-              <a:t>Draw or show a whiteboard graphic. Physically point to the sections: system instructions in the corner (always there), conversation in the middle, pasted documents taking up huge space. Explain that 'context window' is just the technical name for whiteboard size, measured in tokens (roughly ¾ of a word). Warn them about the common beginner mistake: dumping a 60-page PDF in and wondering why quality collapsed. The lesson to repeat: curate, don't dump.</a:t>
+              <a:t>This is the concept that unlocks the whole day, so slow down here. Use the sticky-note image again: we do not upgrade the consultant's brain, we just staple all the previous notes to the new one before we hand it over. Emphasise that the model is stateless and our app is what holds the state. Once people internalise this, everything about sessions and context limits makes obvious sense. Ask if anyone wants it explained a second way before moving on.</a:t>
             </a:r>
           </a:p>
         </p:txBody>
@@ -720,7 +720,7 @@
           <a:lstStyle/>
           <a:p>
             <a:r>
-              <a:t>This is the core conceptual slide of the day — slow down here. Use the human analogy: short-term memory is remembering what your colleague said two minutes ago; long-term is remembering that they're allergic to peanuts. Give a business example: an agent that remembers you're drafting a proposal for MTN (short-term) AND that your company never uses exclamation marks in client emails (long-term). Tell them most people only ever use short-term memory, and that's why their AI feels shallow.</a:t>
+              <a:t>Introduce the term context window plainly, then immediately anchor it to the desk metaphor. Stress that the system prompt, chat history, retrieved documents and the current question all share the same desk. Mention tokens only briefly: roughly a token is a chunk of a word, and you do not need to count them by hand today. The takeaway is that the space is generous but finite, and long conversations eventually push early details off the edge.</a:t>
             </a:r>
           </a:p>
         </p:txBody>
@@ -790,7 +790,7 @@
           <a:lstStyle/>
           <a:p>
             <a:r>
-              <a:t>Explain sessions with the file-folder analogy: you don't keep every client's paperwork in one drawer. Each session has an ID — that's all it is, a name tag the system uses to fetch the right history. Highlight the professional angle: if they build an assistant for their team or customers, sessions are what stop Customer A's data leaking into Customer B's reply. Mention that this is exactly how support chatbots keep thousands of conversations straight.</a:t>
+              <a:t>Explain sessions as labelled folders. Every message gets filed under a session ID, and when a new message arrives we pull only that folder's history. Give a relatable example: notes about a client project should not surface while planning a family trip. Point out that this is also how a real product serves many users at once, each with their own session, without mixing anyone's data. That last point makes the pattern feel professional rather than academic.</a:t>
             </a:r>
           </a:p>
         </p:txBody>
@@ -860,7 +860,7 @@
           <a:lstStyle/>
           <a:p>
             <a:r>
-              <a:t>Introduce the notebook metaphor: a good executive assistant keeps a one-page cheat sheet about you, not a recording of every word you've said. Walk through the summarise-and-store loop: conversation happens, key facts get extracted, facts get appended to the memory file, next session starts with that file loaded. Mention retrieval (RAG) lightly — 'instead of putting the whole library on the whiteboard, we send a librarian to fetch the right page.' Keep it conceptual; the lab will make it concrete.</a:t>
+              <a:t>This is the hands-on block. Walk through the four steps slowly and let people type along rather than copy blindly. A simple dictionary or list in memory is enough right now; note that it resets when the app restarts and that persistence comes later in the week. The name test in step 4 is the moment of truth, so make space for it and celebrate when the assistant answers correctly. Circulate and help anyone stuck before moving on.</a:t>
             </a:r>
           </a:p>
         </p:txBody>
@@ -930,7 +930,7 @@
           <a:lstStyle/>
           <a:p>
             <a:r>
-              <a:t>Move into build mode. Walk the room; keep energy high. Give a concrete memory-file template on screen: role, industry, tone of voice, top three clients, tools used, things to never do. The 'summarise what you should remember' prompt is the day's power move — get everyone to write it down. Encourage pairs to test each other's agents with a question the agent shouldn't be able to answer unless memory is working. Celebrate the first person whose agent says 'As we discussed earlier...'</a:t>
+              <a:t>Frame this as a good problem to have, the sign of an assistant people actually use. Explain each option in one line: trimming is the simplest, summarising preserves the thread more cheaply, and selective retrieval is the most powerful. Be explicit that a rolling window is the right choice today and that tomorrow's work on documents and retrieval builds directly on option 3. Discourage over-engineering; the goal is a working memory, not a perfect one.</a:t>
             </a:r>
           </a:p>
         </p:txBody>
@@ -1000,7 +1000,7 @@
           <a:lstStyle/>
           <a:p>
             <a:r>
-              <a:t>Close by naming the risk honestly: memory makes an agent more useful and more confidently wrong if the facts rot. Recommend a monthly 15-minute memory review. Cover privacy plainly — treat the memory file like a shared document, because effectively it is. Then celebrate: 'Two days ago it could talk. Today it remembers. Tomorrow, it acts.' Ask each participant to post one line in the group chat about what their agent now remembers — this builds momentum into Day 4.</a:t>
+              <a:t>Close by naming the shift out loud: this morning they had a question-and-answer tool, tonight they have something that follows a conversation. Recap the three ideas in plain language: stateless models, replayed history, scoped sessions. Set up Day 4 with a hook: right now the assistant remembers what you told it, and tomorrow it will know what you have written. Encourage everyone to spend ten minutes tonight just chatting with their build and noticing where memory helps and where it strains.</a:t>
             </a:r>
           </a:p>
         </p:txBody>
@@ -4121,7 +4121,7 @@
               </a:defRPr>
             </a:pPr>
             <a:r>
-              <a:t>Day 3: Give It Memory — Sessions &amp; Context</a:t>
+              <a:t>Day 3: Give It Memory</a:t>
             </a:r>
           </a:p>
         </p:txBody>
@@ -4151,7 +4151,7 @@
               </a:defRPr>
             </a:pPr>
             <a:r>
-              <a:t>Yesterday your assistant could think. Today it will remember.</a:t>
+              <a:t>Yesterday your assistant could answer. Today it will remember.</a:t>
             </a:r>
           </a:p>
           <a:p>
@@ -4164,7 +4164,7 @@
               </a:defRPr>
             </a:pPr>
             <a:r>
-              <a:t>Memory is the difference between a vending machine and a colleague.</a:t>
+              <a:t>Memory is what turns a clever tool into a real companion</a:t>
             </a:r>
           </a:p>
           <a:p>
@@ -4177,20 +4177,7 @@
               </a:defRPr>
             </a:pPr>
             <a:r>
-              <a:t>By the end of today: your agent will recall past chats, hold context, and stop asking you the same question twice.</a:t>
-            </a:r>
-          </a:p>
-          <a:p>
-            <a:pPr>
-              <a:defRPr sz="2400">
-                <a:solidFill>
-                  <a:srgbClr val="FFFFFF"/>
-                </a:solidFill>
-                <a:latin typeface="Arial"/>
-              </a:defRPr>
-            </a:pPr>
-            <a:r>
-              <a:t>No code fear — we start with kitchen-table analogies, then get precise.</a:t>
+              <a:t>By the end of today, your Second Brain will recall your last conversation</a:t>
             </a:r>
           </a:p>
         </p:txBody>
@@ -4245,7 +4232,7 @@
               </a:defRPr>
             </a:pPr>
             <a:r>
-              <a:t>The Goldfish Problem: Why AI Forgets</a:t>
+              <a:t>The Goldfish Problem</a:t>
             </a:r>
           </a:p>
         </p:txBody>
@@ -4275,7 +4262,7 @@
               </a:defRPr>
             </a:pPr>
             <a:r>
-              <a:t>Every message you send is treated as a brand-new conversation by default.</a:t>
+              <a:t>Every message you send is treated like the first message ever</a:t>
             </a:r>
           </a:p>
           <a:p>
@@ -4288,7 +4275,7 @@
               </a:defRPr>
             </a:pPr>
             <a:r>
-              <a:t>The model has no diary, no notebook, no yesterday — it only sees what's in front of it right now.</a:t>
+              <a:t>You say 'my name is Chidi', then ask 'what is my name?' and it has no idea</a:t>
             </a:r>
           </a:p>
           <a:p>
@@ -4301,7 +4288,7 @@
               </a:defRPr>
             </a:pPr>
             <a:r>
-              <a:t>It feels like memory in ChatGPT because the app quietly re-sends the whole chat each time.</a:t>
+              <a:t>This is not a bug. It is the default behaviour of every model</a:t>
             </a:r>
           </a:p>
           <a:p>
@@ -4314,7 +4301,7 @@
               </a:defRPr>
             </a:pPr>
             <a:r>
-              <a:t>Real cost: repeated instructions, lost decisions, inconsistent tone, wasted hours.</a:t>
+              <a:t>The model has knowledge, but no history with you</a:t>
             </a:r>
           </a:p>
         </p:txBody>
@@ -4369,7 +4356,7 @@
               </a:defRPr>
             </a:pPr>
             <a:r>
-              <a:t>The Whiteboard Analogy: Understanding Context Windows</a:t>
+              <a:t>How Memory Actually Works</a:t>
             </a:r>
           </a:p>
         </p:txBody>
@@ -4399,7 +4386,7 @@
               </a:defRPr>
             </a:pPr>
             <a:r>
-              <a:t>Think of the AI's attention as a whiteboard of fixed size — everything it 'knows' right now must fit on it.</a:t>
+              <a:t>The secret: we resend the conversation with every new message</a:t>
             </a:r>
           </a:p>
           <a:p>
@@ -4412,7 +4399,7 @@
               </a:defRPr>
             </a:pPr>
             <a:r>
-              <a:t>Your instructions, the conversation, and any documents all compete for the same space.</a:t>
+              <a:t>Message 1 sends: your question</a:t>
             </a:r>
           </a:p>
           <a:p>
@@ -4425,7 +4412,7 @@
               </a:defRPr>
             </a:pPr>
             <a:r>
-              <a:t>When the board fills up, the oldest notes get wiped to make room — that's why it 'forgets' mid-project.</a:t>
+              <a:t>Message 5 sends: messages 1 through 4, plus your new question</a:t>
             </a:r>
           </a:p>
           <a:p>
@@ -4438,7 +4425,7 @@
               </a:defRPr>
             </a:pPr>
             <a:r>
-              <a:t>Bigger whiteboards exist, but a tidy whiteboard always beats a big messy one.</a:t>
+              <a:t>Memory is not stored inside the model. It is stored by you and replayed</a:t>
             </a:r>
           </a:p>
         </p:txBody>
@@ -4493,7 +4480,7 @@
               </a:defRPr>
             </a:pPr>
             <a:r>
-              <a:t>Two Kinds of Memory: Short-Term vs Long-Term</a:t>
+              <a:t>Meet the Context Window</a:t>
             </a:r>
           </a:p>
         </p:txBody>
@@ -4523,7 +4510,7 @@
               </a:defRPr>
             </a:pPr>
             <a:r>
-              <a:t>Short-term (Session Memory): what happened in this conversation — like a meeting you're currently in.</a:t>
+              <a:t>The context window is how much text the model can hold at once</a:t>
             </a:r>
           </a:p>
           <a:p>
@@ -4536,7 +4523,7 @@
               </a:defRPr>
             </a:pPr>
             <a:r>
-              <a:t>Long-term (Persistent Memory): facts that should survive forever — your brand voice, clients, preferences, policies.</a:t>
+              <a:t>Think of it as the desk, not the filing cabinet</a:t>
             </a:r>
           </a:p>
           <a:p>
@@ -4549,7 +4536,7 @@
               </a:defRPr>
             </a:pPr>
             <a:r>
-              <a:t>Short-term is free and automatic; long-term must be deliberately saved and retrieved.</a:t>
+              <a:t>Everything counts: your messages, its replies, your instructions, your documents</a:t>
             </a:r>
           </a:p>
           <a:p>
@@ -4562,7 +4549,7 @@
               </a:defRPr>
             </a:pPr>
             <a:r>
-              <a:t>Great assistants use both: 'You said earlier...' plus 'I know you always...'</a:t>
+              <a:t>When the desk fills up, the oldest papers fall off the edge</a:t>
             </a:r>
           </a:p>
         </p:txBody>
@@ -4617,7 +4604,7 @@
               </a:defRPr>
             </a:pPr>
             <a:r>
-              <a:t>Sessions: Giving Every Conversation a Name Tag</a:t>
+              <a:t>Sessions: Giving Each Conversation a Name</a:t>
             </a:r>
           </a:p>
         </p:txBody>
@@ -4647,7 +4634,7 @@
               </a:defRPr>
             </a:pPr>
             <a:r>
-              <a:t>A session is simply a labelled container that holds one ongoing conversation and its history.</a:t>
+              <a:t>A session is one conversation, with its own ID and its own history</a:t>
             </a:r>
           </a:p>
           <a:p>
@@ -4660,7 +4647,7 @@
               </a:defRPr>
             </a:pPr>
             <a:r>
-              <a:t>One session per client, project, or workflow — never one giant messy thread.</a:t>
+              <a:t>Work chat, study chat, and personal chat should not bleed into each other</a:t>
             </a:r>
           </a:p>
           <a:p>
@@ -4673,7 +4660,7 @@
               </a:defRPr>
             </a:pPr>
             <a:r>
-              <a:t>Sessions let the agent serve many people at once without mixing anyone's details up.</a:t>
+              <a:t>Same assistant, different memories, chosen by session ID</a:t>
             </a:r>
           </a:p>
           <a:p>
@@ -4686,7 +4673,7 @@
               </a:defRPr>
             </a:pPr>
             <a:r>
-              <a:t>Rule of thumb: if you'd start a new email thread for it, start a new session for it.</a:t>
+              <a:t>This is how one Second Brain serves many parts of your life</a:t>
             </a:r>
           </a:p>
         </p:txBody>
@@ -4741,7 +4728,7 @@
               </a:defRPr>
             </a:pPr>
             <a:r>
-              <a:t>Long-Term Memory in Practice: The Assistant's Notebook</a:t>
+              <a:t>Build It: Wiring Memory In</a:t>
             </a:r>
           </a:p>
         </p:txBody>
@@ -4771,7 +4758,7 @@
               </a:defRPr>
             </a:pPr>
             <a:r>
-              <a:t>Memory files: a simple, editable document of durable facts the agent reads before every task.</a:t>
+              <a:t>Step 1: create a store that keeps messages keyed by session ID</a:t>
             </a:r>
           </a:p>
           <a:p>
@@ -4784,7 +4771,7 @@
               </a:defRPr>
             </a:pPr>
             <a:r>
-              <a:t>Summarise, don't hoard — compress old conversations into short takeaways instead of full transcripts.</a:t>
+              <a:t>Step 2: append every user message and every assistant reply as they happen</a:t>
             </a:r>
           </a:p>
           <a:p>
@@ -4797,7 +4784,7 @@
               </a:defRPr>
             </a:pPr>
             <a:r>
-              <a:t>Knowledge base retrieval: store many documents, and pull in only the relevant paragraphs on demand.</a:t>
+              <a:t>Step 3: load that history and send it with the next request</a:t>
             </a:r>
           </a:p>
           <a:p>
@@ -4810,7 +4797,7 @@
               </a:defRPr>
             </a:pPr>
             <a:r>
-              <a:t>Decide what deserves to be remembered — preferences, decisions and outcomes; not small talk.</a:t>
+              <a:t>Step 4: test it by introducing yourself, then asking who you are</a:t>
             </a:r>
           </a:p>
         </p:txBody>
@@ -4865,7 +4852,7 @@
               </a:defRPr>
             </a:pPr>
             <a:r>
-              <a:t>Hands-On Lab: Build Your Remembering Assistant</a:t>
+              <a:t>When Memory Gets Too Big</a:t>
             </a:r>
           </a:p>
         </p:txBody>
@@ -4895,7 +4882,7 @@
               </a:defRPr>
             </a:pPr>
             <a:r>
-              <a:t>Step 1: Create a memory file with 8–10 durable facts about you or your business.</a:t>
+              <a:t>Long conversations eventually overflow the context window</a:t>
             </a:r>
           </a:p>
           <a:p>
@@ -4908,7 +4895,7 @@
               </a:defRPr>
             </a:pPr>
             <a:r>
-              <a:t>Step 2: Set up named sessions for two different projects and confirm they stay separate.</a:t>
+              <a:t>Option 1: keep a rolling window of the most recent messages</a:t>
             </a:r>
           </a:p>
           <a:p>
@@ -4921,7 +4908,7 @@
               </a:defRPr>
             </a:pPr>
             <a:r>
-              <a:t>Step 3: End a conversation with 'Summarise what you should remember' and save the output.</a:t>
+              <a:t>Option 2: summarise older turns into a short recap and keep the recap</a:t>
             </a:r>
           </a:p>
           <a:p>
@@ -4934,7 +4921,20 @@
               </a:defRPr>
             </a:pPr>
             <a:r>
-              <a:t>Step 4: Open a fresh session tomorrow-style and test — does it still know you?</a:t>
+              <a:t>Option 3: store key facts separately and pull in only what is relevant</a:t>
+            </a:r>
+          </a:p>
+          <a:p>
+            <a:pPr>
+              <a:defRPr sz="2400">
+                <a:solidFill>
+                  <a:srgbClr val="FFFFFF"/>
+                </a:solidFill>
+                <a:latin typeface="Arial"/>
+              </a:defRPr>
+            </a:pPr>
+            <a:r>
+              <a:t>Start with option 1. Reach for the others when you feel the limit</a:t>
             </a:r>
           </a:p>
         </p:txBody>
@@ -4989,7 +4989,7 @@
               </a:defRPr>
             </a:pPr>
             <a:r>
-              <a:t>Guardrails, Wins &amp; What's Next</a:t>
+              <a:t>What You Built Today</a:t>
             </a:r>
           </a:p>
         </p:txBody>
@@ -5019,7 +5019,7 @@
               </a:defRPr>
             </a:pPr>
             <a:r>
-              <a:t>Memory hygiene: review and prune monthly — stale facts cause confident, wrong answers.</a:t>
+              <a:t>You understand why models forget, and how we make them remember</a:t>
             </a:r>
           </a:p>
           <a:p>
@@ -5032,7 +5032,7 @@
               </a:defRPr>
             </a:pPr>
             <a:r>
-              <a:t>Privacy first: never store passwords, IDs, or client data you wouldn't put in a shared drive.</a:t>
+              <a:t>You know the difference between the desk and the filing cabinet</a:t>
             </a:r>
           </a:p>
           <a:p>
@@ -5045,7 +5045,7 @@
               </a:defRPr>
             </a:pPr>
             <a:r>
-              <a:t>Today's win: your assistant now has continuity — it knows you, your work and your standards.</a:t>
+              <a:t>Your assistant now holds a real conversation across many turns</a:t>
             </a:r>
           </a:p>
           <a:p>
@@ -5058,7 +5058,7 @@
               </a:defRPr>
             </a:pPr>
             <a:r>
-              <a:t>Tomorrow (Day 4): Give it Hands — connecting your agent to real tools and taking action.</a:t>
+              <a:t>Tomorrow: feed it your own documents and notes</a:t>
             </a:r>
           </a:p>
         </p:txBody>
